--- a/books/Refactoring/session/Refactoring_2.pptx
+++ b/books/Refactoring/session/Refactoring_2.pptx
@@ -914,6 +914,35 @@
           <a:bodyPr/>
           <a:lstStyle/>
           <a:p>
+            <a:pPr marL="0" marR="0" lvl="0" indent="0" defTabSz="457200" eaLnBrk="1" fontAlgn="auto" latinLnBrk="0" hangingPunct="1">
+              <a:lnSpc>
+                <a:spcPct val="117999"/>
+              </a:lnSpc>
+              <a:spcBef>
+                <a:spcPts val="0"/>
+              </a:spcBef>
+              <a:spcAft>
+                <a:spcPts val="0"/>
+              </a:spcAft>
+              <a:buClrTx/>
+              <a:buSzTx/>
+              <a:buFontTx/>
+              <a:buNone/>
+              <a:tabLst/>
+              <a:defRPr/>
+            </a:pPr>
+            <a:r>
+              <a:rPr lang="en-CN" sz="2400" dirty="0">
+                <a:solidFill>
+                  <a:schemeClr val="bg2">
+                    <a:lumMod val="10000"/>
+                  </a:schemeClr>
+                </a:solidFill>
+              </a:rPr>
+              <a:t>code C7_7</a:t>
+            </a:r>
+          </a:p>
+          <a:p>
             <a:endParaRPr lang="en-CN" dirty="0"/>
           </a:p>
         </p:txBody>
@@ -7088,7 +7117,7 @@
           </a:ln>
           <a:extLst>
             <a:ext uri="{C572A759-6A51-4108-AA02-DFA0A04FC94B}">
-              <ma14:wrappingTextBoxFlag xmlns:ma14="http://schemas.microsoft.com/office/mac/drawingml/2011/main" xmlns:a14="http://schemas.microsoft.com/office/drawing/2010/main" xmlns:m="http://schemas.openxmlformats.org/officeDocument/2006/math" xmlns="" val="1"/>
+              <ma14:wrappingTextBoxFlag xmlns="" xmlns:m="http://schemas.openxmlformats.org/officeDocument/2006/math" xmlns:a14="http://schemas.microsoft.com/office/drawing/2010/main" xmlns:ma14="http://schemas.microsoft.com/office/mac/drawingml/2011/main" val="1"/>
             </a:ext>
           </a:extLst>
         </p:spPr>
@@ -7127,7 +7156,7 @@
           </a:ln>
           <a:extLst>
             <a:ext uri="{C572A759-6A51-4108-AA02-DFA0A04FC94B}">
-              <ma14:wrappingTextBoxFlag xmlns:ma14="http://schemas.microsoft.com/office/mac/drawingml/2011/main" xmlns:a14="http://schemas.microsoft.com/office/drawing/2010/main" xmlns:m="http://schemas.openxmlformats.org/officeDocument/2006/math" xmlns="" val="1"/>
+              <ma14:wrappingTextBoxFlag xmlns="" xmlns:m="http://schemas.openxmlformats.org/officeDocument/2006/math" xmlns:a14="http://schemas.microsoft.com/office/drawing/2010/main" xmlns:ma14="http://schemas.microsoft.com/office/mac/drawingml/2011/main" val="1"/>
             </a:ext>
           </a:extLst>
         </p:spPr>
@@ -7969,7 +7998,7 @@
           </a:prstGeom>
           <a:extLst>
             <a:ext uri="{C572A759-6A51-4108-AA02-DFA0A04FC94B}">
-              <ma14:wrappingTextBoxFlag xmlns:ma14="http://schemas.microsoft.com/office/mac/drawingml/2011/main" xmlns:a14="http://schemas.microsoft.com/office/drawing/2010/main" xmlns:m="http://schemas.openxmlformats.org/officeDocument/2006/math" xmlns="" val="1"/>
+              <ma14:wrappingTextBoxFlag xmlns="" xmlns:m="http://schemas.openxmlformats.org/officeDocument/2006/math" xmlns:a14="http://schemas.microsoft.com/office/drawing/2010/main" xmlns:ma14="http://schemas.microsoft.com/office/mac/drawingml/2011/main" val="1"/>
             </a:ext>
           </a:extLst>
         </p:spPr>
@@ -8075,7 +8104,7 @@
           </a:ln>
           <a:extLst>
             <a:ext uri="{C572A759-6A51-4108-AA02-DFA0A04FC94B}">
-              <ma14:wrappingTextBoxFlag xmlns:ma14="http://schemas.microsoft.com/office/mac/drawingml/2011/main" xmlns:a14="http://schemas.microsoft.com/office/drawing/2010/main" xmlns:m="http://schemas.openxmlformats.org/officeDocument/2006/math" xmlns="" val="1"/>
+              <ma14:wrappingTextBoxFlag xmlns="" xmlns:m="http://schemas.openxmlformats.org/officeDocument/2006/math" xmlns:a14="http://schemas.microsoft.com/office/drawing/2010/main" xmlns:ma14="http://schemas.microsoft.com/office/mac/drawingml/2011/main" val="1"/>
             </a:ext>
           </a:extLst>
         </p:spPr>
@@ -8551,11 +8580,46 @@
             <a:pPr marL="0" indent="0">
               <a:buNone/>
             </a:pPr>
-            <a:endParaRPr lang="en-CN" sz="4000" dirty="0">
-              <a:solidFill>
-                <a:srgbClr val="FF0000"/>
-              </a:solidFill>
-            </a:endParaRPr>
+            <a:r>
+              <a:rPr lang="en-US" altLang="zh-CN" sz="4000" dirty="0">
+                <a:solidFill>
+                  <a:schemeClr val="bg2">
+                    <a:lumMod val="10000"/>
+                  </a:schemeClr>
+                </a:solidFill>
+              </a:rPr>
+              <a:t>code</a:t>
+            </a:r>
+            <a:r>
+              <a:rPr lang="zh-CN" altLang="en-US" sz="4000" dirty="0">
+                <a:solidFill>
+                  <a:schemeClr val="bg2">
+                    <a:lumMod val="10000"/>
+                  </a:schemeClr>
+                </a:solidFill>
+              </a:rPr>
+              <a:t>：</a:t>
+            </a:r>
+            <a:r>
+              <a:rPr lang="en-US" sz="4000" dirty="0">
+                <a:solidFill>
+                  <a:schemeClr val="bg2">
+                    <a:lumMod val="10000"/>
+                  </a:schemeClr>
+                </a:solidFill>
+              </a:rPr>
+              <a:t> C</a:t>
+            </a:r>
+            <a:r>
+              <a:rPr lang="en-CN" sz="4000" dirty="0">
+                <a:solidFill>
+                  <a:schemeClr val="bg2">
+                    <a:lumMod val="10000"/>
+                  </a:schemeClr>
+                </a:solidFill>
+              </a:rPr>
+              <a:t>6_5</a:t>
+            </a:r>
           </a:p>
         </p:txBody>
       </p:sp>
@@ -10043,16 +10107,13 @@
           </a:bodyPr>
           <a:lstStyle/>
           <a:p>
-            <a:r>
-              <a:rPr lang="en-CN" sz="4000" dirty="0">
-                <a:solidFill>
-                  <a:schemeClr val="bg2">
-                    <a:lumMod val="10000"/>
-                  </a:schemeClr>
-                </a:solidFill>
-              </a:rPr>
-              <a:t>code C7_7</a:t>
-            </a:r>
+            <a:endParaRPr lang="en-CN" sz="4000" dirty="0">
+              <a:solidFill>
+                <a:schemeClr val="bg2">
+                  <a:lumMod val="10000"/>
+                </a:schemeClr>
+              </a:solidFill>
+            </a:endParaRPr>
           </a:p>
         </p:txBody>
       </p:sp>
@@ -11532,26 +11593,26 @@
               <a:t>	</a:t>
             </a:r>
             <a:r>
-              <a:rPr lang="en-CN" sz="4800" b="0" dirty="0">
+              <a:rPr lang="en-CN" sz="4800" b="0" strike="sngStrike" dirty="0">
                 <a:solidFill>
-                  <a:schemeClr val="bg2">
-                    <a:lumMod val="10000"/>
-                  </a:schemeClr>
+                  <a:srgbClr val="FF0000"/>
                 </a:solidFill>
               </a:rPr>
               <a:t>code c8_1</a:t>
             </a:r>
             <a:r>
-              <a:rPr lang="en-US" altLang="zh-CN" sz="4800" b="0" dirty="0">
+              <a:rPr lang="en-US" altLang="zh-CN" sz="4800" b="0" strike="sngStrike" dirty="0">
                 <a:solidFill>
-                  <a:schemeClr val="bg2">
-                    <a:lumMod val="10000"/>
-                  </a:schemeClr>
+                  <a:srgbClr val="FF0000"/>
                 </a:solidFill>
               </a:rPr>
               <a:t>5</a:t>
             </a:r>
-            <a:endParaRPr lang="en-US" dirty="0"/>
+            <a:endParaRPr lang="en-US" strike="sngStrike" dirty="0">
+              <a:solidFill>
+                <a:srgbClr val="FF0000"/>
+              </a:solidFill>
+            </a:endParaRPr>
           </a:p>
           <a:p>
             <a:endParaRPr lang="en-CN" dirty="0"/>
@@ -11585,7 +11646,7 @@
           </a:ln>
           <a:extLst>
             <a:ext uri="{C572A759-6A51-4108-AA02-DFA0A04FC94B}">
-              <ma14:wrappingTextBoxFlag xmlns:ma14="http://schemas.microsoft.com/office/mac/drawingml/2011/main" xmlns:a14="http://schemas.microsoft.com/office/drawing/2010/main" xmlns:m="http://schemas.openxmlformats.org/officeDocument/2006/math" xmlns="" val="1"/>
+              <ma14:wrappingTextBoxFlag xmlns="" xmlns:m="http://schemas.openxmlformats.org/officeDocument/2006/math" xmlns:a14="http://schemas.microsoft.com/office/drawing/2010/main" xmlns:ma14="http://schemas.microsoft.com/office/mac/drawingml/2011/main" val="1"/>
             </a:ext>
           </a:extLst>
         </p:spPr>
@@ -14602,11 +14663,15 @@
             </a:r>
             <a:r>
               <a:rPr dirty="0" err="1"/>
-              <a:t>停止，等待</a:t>
-            </a:r>
-            <a:r>
-              <a:rPr dirty="0"/>
-              <a:t>， </a:t>
+              <a:t>停</a:t>
+            </a:r>
+            <a:r>
+              <a:rPr lang="zh-CN" altLang="en-US" dirty="0"/>
+              <a:t>止</a:t>
+            </a:r>
+            <a:r>
+              <a:rPr lang="en-CN" dirty="0"/>
+              <a:t>，</a:t>
             </a:r>
             <a:r>
               <a:rPr dirty="0" err="1"/>
